--- a/system-design-101/vi/lessons/sd-09-003/slides/sd-09-003.pptx
+++ b/system-design-101/vi/lessons/sd-09-003/slides/sd-09-003.pptx
@@ -2494,6 +2494,39 @@
               <a:buNone/>
             </a:pPr>
             <a:r>
+              <a:rPr lang="en-US" sz="1650" dirty="0" spc="1" kern="0">
+                <a:solidFill>
+                  <a:srgbClr val="9AA0B5"/>
+                </a:solidFill>
+                <a:latin typeface="Be Vietnam Pro" pitchFamily="34" charset="0"/>
+                <a:ea typeface="Be Vietnam Pro" pitchFamily="34" charset="-122"/>
+                <a:cs typeface="Be Vietnam Pro" pitchFamily="34" charset="-120"/>
+              </a:rPr>
+              <a:t>API,</a:t>
+            </a:r>
+            <a:r>
+              <a:rPr lang="en-US" sz="1650" dirty="0" spc="4" kern="0">
+                <a:solidFill>
+                  <a:srgbClr val="9AA0B5"/>
+                </a:solidFill>
+                <a:latin typeface="Be Vietnam Pro" pitchFamily="34" charset="0"/>
+                <a:ea typeface="Be Vietnam Pro" pitchFamily="34" charset="-122"/>
+                <a:cs typeface="Be Vietnam Pro" pitchFamily="34" charset="-120"/>
+              </a:rPr>
+              <a:t> JSON:</a:t>
+            </a:r>
+            <a:r>
+              <a:rPr lang="en-US" sz="1650" dirty="0" spc="-12" kern="0">
+                <a:solidFill>
+                  <a:srgbClr val="9AA0B5"/>
+                </a:solidFill>
+                <a:latin typeface="Be Vietnam Pro" pitchFamily="34" charset="0"/>
+                <a:ea typeface="Be Vietnam Pro" pitchFamily="34" charset="-122"/>
+                <a:cs typeface="Be Vietnam Pro" pitchFamily="34" charset="-120"/>
+              </a:rPr>
+              <a:t> xem</a:t>
+            </a:r>
+            <a:r>
               <a:rPr lang="en-US" sz="1650" dirty="0" spc="0" kern="0">
                 <a:solidFill>
                   <a:srgbClr val="9AA0B5"/>
@@ -2502,10 +2535,10 @@
                 <a:ea typeface="Be Vietnam Pro" pitchFamily="34" charset="-122"/>
                 <a:cs typeface="Be Vietnam Pro" pitchFamily="34" charset="-120"/>
               </a:rPr>
-              <a:t>API:</a:t>
-            </a:r>
-            <a:r>
-              <a:rPr lang="en-US" sz="1650" dirty="0" spc="-1" kern="0">
+              <a:t> phần viết</a:t>
+            </a:r>
+            <a:r>
+              <a:rPr lang="en-US" sz="1650" dirty="0" spc="-12" kern="0">
                 <a:solidFill>
                   <a:srgbClr val="9AA0B5"/>
                 </a:solidFill>
@@ -2513,10 +2546,10 @@
                 <a:ea typeface="Be Vietnam Pro" pitchFamily="34" charset="-122"/>
                 <a:cs typeface="Be Vietnam Pro" pitchFamily="34" charset="-120"/>
               </a:rPr>
-              <a:t> giao</a:t>
-            </a:r>
-            <a:r>
-              <a:rPr lang="en-US" sz="1650" dirty="0" spc="1" kern="0">
+              <a:t> tắt</a:t>
+            </a:r>
+            <a:r>
+              <a:rPr lang="en-US" sz="1650" dirty="0" spc="3" kern="0">
                 <a:solidFill>
                   <a:srgbClr val="9AA0B5"/>
                 </a:solidFill>
@@ -2524,7 +2557,7 @@
                 <a:ea typeface="Be Vietnam Pro" pitchFamily="34" charset="-122"/>
                 <a:cs typeface="Be Vietnam Pro" pitchFamily="34" charset="-120"/>
               </a:rPr>
-              <a:t> diện</a:t>
+              <a:t> ở</a:t>
             </a:r>
             <a:r>
               <a:rPr lang="en-US" sz="1650" dirty="0" spc="0" kern="0">
@@ -2535,106 +2568,7 @@
                 <a:ea typeface="Be Vietnam Pro" pitchFamily="34" charset="-122"/>
                 <a:cs typeface="Be Vietnam Pro" pitchFamily="34" charset="-120"/>
               </a:rPr>
-              <a:t> lập</a:t>
-            </a:r>
-            <a:r>
-              <a:rPr lang="en-US" sz="1650" dirty="0" spc="7" kern="0">
-                <a:solidFill>
-                  <a:srgbClr val="9AA0B5"/>
-                </a:solidFill>
-                <a:latin typeface="Be Vietnam Pro" pitchFamily="34" charset="0"/>
-                <a:ea typeface="Be Vietnam Pro" pitchFamily="34" charset="-122"/>
-                <a:cs typeface="Be Vietnam Pro" pitchFamily="34" charset="-120"/>
-              </a:rPr>
-              <a:t> trình</a:t>
-            </a:r>
-            <a:r>
-              <a:rPr lang="en-US" sz="1650" dirty="0" spc="16" kern="0">
-                <a:solidFill>
-                  <a:srgbClr val="9AA0B5"/>
-                </a:solidFill>
-                <a:latin typeface="Be Vietnam Pro" pitchFamily="34" charset="0"/>
-                <a:ea typeface="Be Vietnam Pro" pitchFamily="34" charset="-122"/>
-                <a:cs typeface="Be Vietnam Pro" pitchFamily="34" charset="-120"/>
-              </a:rPr>
-              <a:t> ứng</a:t>
-            </a:r>
-            <a:r>
-              <a:rPr lang="en-US" sz="1650" dirty="0" spc="0" kern="0">
-                <a:solidFill>
-                  <a:srgbClr val="9AA0B5"/>
-                </a:solidFill>
-                <a:latin typeface="Be Vietnam Pro" pitchFamily="34" charset="0"/>
-                <a:ea typeface="Be Vietnam Pro" pitchFamily="34" charset="-122"/>
-                <a:cs typeface="Be Vietnam Pro" pitchFamily="34" charset="-120"/>
-              </a:rPr>
-              <a:t> dụng ·</a:t>
-            </a:r>
-            <a:r>
-              <a:rPr lang="en-US" sz="1650" dirty="0" spc="4" kern="0">
-                <a:solidFill>
-                  <a:srgbClr val="9AA0B5"/>
-                </a:solidFill>
-                <a:latin typeface="Be Vietnam Pro" pitchFamily="34" charset="0"/>
-                <a:ea typeface="Be Vietnam Pro" pitchFamily="34" charset="-122"/>
-                <a:cs typeface="Be Vietnam Pro" pitchFamily="34" charset="-120"/>
-              </a:rPr>
-              <a:t> JSON:</a:t>
-            </a:r>
-            <a:r>
-              <a:rPr lang="en-US" sz="1650" dirty="0" spc="3" kern="0">
-                <a:solidFill>
-                  <a:srgbClr val="9AA0B5"/>
-                </a:solidFill>
-                <a:latin typeface="Be Vietnam Pro" pitchFamily="34" charset="0"/>
-                <a:ea typeface="Be Vietnam Pro" pitchFamily="34" charset="-122"/>
-                <a:cs typeface="Be Vietnam Pro" pitchFamily="34" charset="-120"/>
-              </a:rPr>
-              <a:t> ký</a:t>
-            </a:r>
-            <a:r>
-              <a:rPr lang="en-US" sz="1650" dirty="0" spc="0" kern="0">
-                <a:solidFill>
-                  <a:srgbClr val="9AA0B5"/>
-                </a:solidFill>
-                <a:latin typeface="Be Vietnam Pro" pitchFamily="34" charset="0"/>
-                <a:ea typeface="Be Vietnam Pro" pitchFamily="34" charset="-122"/>
-                <a:cs typeface="Be Vietnam Pro" pitchFamily="34" charset="-120"/>
-              </a:rPr>
-              <a:t> hiệu</a:t>
-            </a:r>
-            <a:r>
-              <a:rPr lang="en-US" sz="1650" dirty="0" spc="11" kern="0">
-                <a:solidFill>
-                  <a:srgbClr val="9AA0B5"/>
-                </a:solidFill>
-                <a:latin typeface="Be Vietnam Pro" pitchFamily="34" charset="0"/>
-                <a:ea typeface="Be Vietnam Pro" pitchFamily="34" charset="-122"/>
-                <a:cs typeface="Be Vietnam Pro" pitchFamily="34" charset="-120"/>
-              </a:rPr>
-              <a:t> đối</a:t>
-            </a:r>
-            <a:r>
-              <a:rPr lang="en-US" sz="1650" dirty="0" spc="5" kern="0">
-                <a:solidFill>
-                  <a:srgbClr val="9AA0B5"/>
-                </a:solidFill>
-                <a:latin typeface="Be Vietnam Pro" pitchFamily="34" charset="0"/>
-                <a:ea typeface="Be Vietnam Pro" pitchFamily="34" charset="-122"/>
-                <a:cs typeface="Be Vietnam Pro" pitchFamily="34" charset="-120"/>
-              </a:rPr>
-              <a:t> tượng</a:t>
-            </a:r>
-            <a:r>
-              <a:rPr lang="en-US" sz="1650" dirty="0" spc="-4" kern="0">
-                <a:solidFill>
-                  <a:srgbClr val="9AA0B5"/>
-                </a:solidFill>
-                <a:latin typeface="Be Vietnam Pro" pitchFamily="34" charset="0"/>
-                <a:ea typeface="Be Vietnam Pro" pitchFamily="34" charset="-122"/>
-                <a:cs typeface="Be Vietnam Pro" pitchFamily="34" charset="-120"/>
-              </a:rPr>
-              <a:t> JavaScript</a:t>
+              <a:t> slide cuối</a:t>
             </a:r>
             <a:endParaRPr lang="en-US" sz="1650" dirty="0"/>
           </a:p>
@@ -4561,7 +4495,7 @@
               <a:t>JSON</a:t>
             </a:r>
             <a:r>
-              <a:rPr lang="en-US" sz="2250" dirty="0" spc="-17" kern="0">
+              <a:rPr lang="en-US" sz="2250" dirty="0" spc="-14" kern="0">
                 <a:solidFill>
                   <a:srgbClr val="6B6A66"/>
                 </a:solidFill>
@@ -4569,10 +4503,10 @@
                 <a:ea typeface="Be Vietnam Pro" pitchFamily="34" charset="-122"/>
                 <a:cs typeface="Be Vietnam Pro" pitchFamily="34" charset="-120"/>
               </a:rPr>
-              <a:t> Crack</a:t>
-            </a:r>
-            <a:r>
-              <a:rPr lang="en-US" sz="2250" dirty="0" spc="0" kern="0">
+              <a:t> Crack:</a:t>
+            </a:r>
+            <a:r>
+              <a:rPr lang="en-US" sz="2250" dirty="0" spc="-3" kern="0">
                 <a:solidFill>
                   <a:srgbClr val="6B6A66"/>
                 </a:solidFill>
@@ -4580,10 +4514,10 @@
                 <a:ea typeface="Be Vietnam Pro" pitchFamily="34" charset="-122"/>
                 <a:cs typeface="Be Vietnam Pro" pitchFamily="34" charset="-120"/>
               </a:rPr>
-              <a:t> là</a:t>
-            </a:r>
-            <a:r>
-              <a:rPr lang="en-US" sz="2250" dirty="0" spc="-4" kern="0">
+              <a:t> một</a:t>
+            </a:r>
+            <a:r>
+              <a:rPr lang="en-US" sz="2250" dirty="0" spc="1" kern="0">
                 <a:solidFill>
                   <a:srgbClr val="6B6A66"/>
                 </a:solidFill>
@@ -4591,10 +4525,10 @@
                 <a:ea typeface="Be Vietnam Pro" pitchFamily="34" charset="-122"/>
                 <a:cs typeface="Be Vietnam Pro" pitchFamily="34" charset="-120"/>
               </a:rPr>
-              <a:t> một</a:t>
-            </a:r>
-            <a:r>
-              <a:rPr lang="en-US" sz="2250" dirty="0" spc="9" kern="0">
+              <a:t> cách</a:t>
+            </a:r>
+            <a:r>
+              <a:rPr lang="en-US" sz="2250" dirty="0" spc="-18" kern="0">
                 <a:solidFill>
                   <a:srgbClr val="6B6A66"/>
                 </a:solidFill>
@@ -4602,10 +4536,10 @@
                 <a:ea typeface="Be Vietnam Pro" pitchFamily="34" charset="-122"/>
                 <a:cs typeface="Be Vietnam Pro" pitchFamily="34" charset="-120"/>
               </a:rPr>
-              <a:t> lựa</a:t>
-            </a:r>
-            <a:r>
-              <a:rPr lang="en-US" sz="2250" dirty="0" spc="3" kern="0">
+              <a:t> xem</a:t>
+            </a:r>
+            <a:r>
+              <a:rPr lang="en-US" sz="2250" dirty="0" spc="1" kern="0">
                 <a:solidFill>
                   <a:srgbClr val="6B6A66"/>
                 </a:solidFill>
@@ -4613,10 +4547,10 @@
                 <a:ea typeface="Be Vietnam Pro" pitchFamily="34" charset="-122"/>
                 <a:cs typeface="Be Vietnam Pro" pitchFamily="34" charset="-120"/>
               </a:rPr>
-              <a:t> chọn</a:t>
-            </a:r>
-            <a:r>
-              <a:rPr lang="en-US" sz="2250" dirty="0" spc="16" kern="0">
+              <a:t> cấu</a:t>
+            </a:r>
+            <a:r>
+              <a:rPr lang="en-US" sz="2250" dirty="0" spc="2" kern="0">
                 <a:solidFill>
                   <a:srgbClr val="6B6A66"/>
                 </a:solidFill>
@@ -4624,10 +4558,10 @@
                 <a:ea typeface="Be Vietnam Pro" pitchFamily="34" charset="-122"/>
                 <a:cs typeface="Be Vietnam Pro" pitchFamily="34" charset="-120"/>
               </a:rPr>
-              <a:t> để</a:t>
-            </a:r>
-            <a:r>
-              <a:rPr lang="en-US" sz="2250" dirty="0" spc="-18" kern="0">
+              <a:t> trúc</a:t>
+            </a:r>
+            <a:r>
+              <a:rPr lang="en-US" sz="2250" dirty="0" spc="-2" kern="0">
                 <a:solidFill>
                   <a:srgbClr val="6B6A66"/>
                 </a:solidFill>
@@ -4635,10 +4569,10 @@
                 <a:ea typeface="Be Vietnam Pro" pitchFamily="34" charset="-122"/>
                 <a:cs typeface="Be Vietnam Pro" pitchFamily="34" charset="-120"/>
               </a:rPr>
-              <a:t> xem</a:t>
-            </a:r>
-            <a:r>
-              <a:rPr lang="en-US" sz="2250" dirty="0" spc="0" kern="0">
+              <a:t> bằng</a:t>
+            </a:r>
+            <a:r>
+              <a:rPr lang="en-US" sz="2250" dirty="0" spc="18" kern="0">
                 <a:solidFill>
                   <a:srgbClr val="6B6A66"/>
                 </a:solidFill>
@@ -4646,43 +4580,10 @@
                 <a:ea typeface="Be Vietnam Pro" pitchFamily="34" charset="-122"/>
                 <a:cs typeface="Be Vietnam Pro" pitchFamily="34" charset="-120"/>
               </a:rPr>
-              <a:t> cấu</a:t>
+              <a:t> đồ</a:t>
             </a:r>
             <a:r>
               <a:rPr lang="en-US" sz="2250" dirty="0" spc="2" kern="0">
-                <a:solidFill>
-                  <a:srgbClr val="6B6A66"/>
-                </a:solidFill>
-                <a:latin typeface="Be Vietnam Pro" pitchFamily="34" charset="0"/>
-                <a:ea typeface="Be Vietnam Pro" pitchFamily="34" charset="-122"/>
-                <a:cs typeface="Be Vietnam Pro" pitchFamily="34" charset="-120"/>
-              </a:rPr>
-              <a:t> trúc</a:t>
-            </a:r>
-            <a:r>
-              <a:rPr lang="en-US" sz="2250" dirty="0" spc="-2" kern="0">
-                <a:solidFill>
-                  <a:srgbClr val="6B6A66"/>
-                </a:solidFill>
-                <a:latin typeface="Be Vietnam Pro" pitchFamily="34" charset="0"/>
-                <a:ea typeface="Be Vietnam Pro" pitchFamily="34" charset="-122"/>
-                <a:cs typeface="Be Vietnam Pro" pitchFamily="34" charset="-120"/>
-              </a:rPr>
-              <a:t> bằng</a:t>
-            </a:r>
-            <a:r>
-              <a:rPr lang="en-US" sz="2250" dirty="0" spc="19" kern="0">
-                <a:solidFill>
-                  <a:srgbClr val="6B6A66"/>
-                </a:solidFill>
-                <a:latin typeface="Be Vietnam Pro" pitchFamily="34" charset="0"/>
-                <a:ea typeface="Be Vietnam Pro" pitchFamily="34" charset="-122"/>
-                <a:cs typeface="Be Vietnam Pro" pitchFamily="34" charset="-120"/>
-              </a:rPr>
-              <a:t> đồ</a:t>
-            </a:r>
-            <a:r>
-              <a:rPr lang="en-US" sz="2250" dirty="0" spc="1" kern="0">
                 <a:solidFill>
                   <a:srgbClr val="6B6A66"/>
                 </a:solidFill>
@@ -8053,7 +7954,7 @@
               <a:buNone/>
             </a:pPr>
             <a:r>
-              <a:rPr lang="en-US" sz="2700" dirty="0" spc="-7" kern="0">
+              <a:rPr lang="en-US" sz="2700" dirty="0" spc="0" kern="0">
                 <a:solidFill>
                   <a:srgbClr val="14161C"/>
                 </a:solidFill>
@@ -8061,7 +7962,29 @@
                 <a:ea typeface="Be Vietnam Pro" pitchFamily="34" charset="-122"/>
                 <a:cs typeface="Be Vietnam Pro" pitchFamily="34" charset="-120"/>
               </a:rPr>
-              <a:t>Một</a:t>
+              <a:t>Mở</a:t>
+            </a:r>
+            <a:r>
+              <a:rPr lang="en-US" sz="2700" dirty="0" spc="-24" kern="0">
+                <a:solidFill>
+                  <a:srgbClr val="14161C"/>
+                </a:solidFill>
+                <a:latin typeface="Be Vietnam Pro" pitchFamily="34" charset="0"/>
+                <a:ea typeface="Be Vietnam Pro" pitchFamily="34" charset="-122"/>
+                <a:cs typeface="Be Vietnam Pro" pitchFamily="34" charset="-120"/>
+              </a:rPr>
+              <a:t> rộng</a:t>
+            </a:r>
+            <a:r>
+              <a:rPr lang="en-US" sz="2700" dirty="0" spc="20" kern="0">
+                <a:solidFill>
+                  <a:srgbClr val="14161C"/>
+                </a:solidFill>
+                <a:latin typeface="Be Vietnam Pro" pitchFamily="34" charset="0"/>
+                <a:ea typeface="Be Vietnam Pro" pitchFamily="34" charset="-122"/>
+                <a:cs typeface="Be Vietnam Pro" pitchFamily="34" charset="-120"/>
+              </a:rPr>
+              <a:t> từng</a:t>
             </a:r>
             <a:r>
               <a:rPr lang="en-US" sz="2700" dirty="0" spc="-2" kern="0">
@@ -8072,10 +7995,10 @@
                 <a:ea typeface="Be Vietnam Pro" pitchFamily="34" charset="-122"/>
                 <a:cs typeface="Be Vietnam Pro" pitchFamily="34" charset="-120"/>
               </a:rPr>
-              <a:t> nhánh mở</a:t>
-            </a:r>
-            <a:r>
-              <a:rPr lang="en-US" sz="2700" dirty="0" spc="-24" kern="0">
+              <a:t> nhánh</a:t>
+            </a:r>
+            <a:r>
+              <a:rPr lang="en-US" sz="2700" dirty="0" spc="15" kern="0">
                 <a:solidFill>
                   <a:srgbClr val="14161C"/>
                 </a:solidFill>
@@ -8083,10 +8006,10 @@
                 <a:ea typeface="Be Vietnam Pro" pitchFamily="34" charset="-122"/>
                 <a:cs typeface="Be Vietnam Pro" pitchFamily="34" charset="-120"/>
               </a:rPr>
-              <a:t> rộng trên</a:t>
-            </a:r>
-            <a:r>
-              <a:rPr lang="en-US" sz="2700" dirty="0" spc="15" kern="0">
+              <a:t> để</a:t>
+            </a:r>
+            <a:r>
+              <a:rPr lang="en-US" sz="2700" dirty="0" spc="-1" kern="0">
                 <a:solidFill>
                   <a:srgbClr val="14161C"/>
                 </a:solidFill>
@@ -8094,7 +8017,29 @@
                 <a:ea typeface="Be Vietnam Pro" pitchFamily="34" charset="-122"/>
                 <a:cs typeface="Be Vietnam Pro" pitchFamily="34" charset="-120"/>
               </a:rPr>
-              <a:t> đồ</a:t>
+              <a:t> lần</a:t>
+            </a:r>
+            <a:r>
+              <a:rPr lang="en-US" sz="2700" dirty="0" spc="-3" kern="0">
+                <a:solidFill>
+                  <a:srgbClr val="14161C"/>
+                </a:solidFill>
+                <a:latin typeface="Be Vietnam Pro" pitchFamily="34" charset="0"/>
+                <a:ea typeface="Be Vietnam Pro" pitchFamily="34" charset="-122"/>
+                <a:cs typeface="Be Vietnam Pro" pitchFamily="34" charset="-120"/>
+              </a:rPr>
+              <a:t> theo</a:t>
+            </a:r>
+            <a:r>
+              <a:rPr lang="en-US" sz="2700" dirty="0" spc="-2" kern="0">
+                <a:solidFill>
+                  <a:srgbClr val="14161C"/>
+                </a:solidFill>
+                <a:latin typeface="Be Vietnam Pro" pitchFamily="34" charset="0"/>
+                <a:ea typeface="Be Vietnam Pro" pitchFamily="34" charset="-122"/>
+                <a:cs typeface="Be Vietnam Pro" pitchFamily="34" charset="-120"/>
+              </a:rPr>
+              <a:t> đúng</a:t>
             </a:r>
             <a:r>
               <a:rPr lang="en-US" sz="2700" dirty="0" spc="-1" kern="0">
@@ -8105,106 +8050,7 @@
                 <a:ea typeface="Be Vietnam Pro" pitchFamily="34" charset="-122"/>
                 <a:cs typeface="Be Vietnam Pro" pitchFamily="34" charset="-120"/>
               </a:rPr>
-              <a:t> thị</a:t>
-            </a:r>
-            <a:r>
-              <a:rPr lang="en-US" sz="2700" dirty="0" spc="-2" kern="0">
-                <a:solidFill>
-                  <a:srgbClr val="14161C"/>
-                </a:solidFill>
-                <a:latin typeface="Be Vietnam Pro" pitchFamily="34" charset="0"/>
-                <a:ea typeface="Be Vietnam Pro" pitchFamily="34" charset="-122"/>
-                <a:cs typeface="Be Vietnam Pro" pitchFamily="34" charset="-120"/>
-              </a:rPr>
-              <a:t> giúp</a:t>
-            </a:r>
-            <a:r>
-              <a:rPr lang="en-US" sz="2700" dirty="0" spc="-1" kern="0">
-                <a:solidFill>
-                  <a:srgbClr val="14161C"/>
-                </a:solidFill>
-                <a:latin typeface="Be Vietnam Pro" pitchFamily="34" charset="0"/>
-                <a:ea typeface="Be Vietnam Pro" pitchFamily="34" charset="-122"/>
-                <a:cs typeface="Be Vietnam Pro" pitchFamily="34" charset="-120"/>
-              </a:rPr>
-              <a:t> lần</a:t>
-            </a:r>
-            <a:r>
-              <a:rPr lang="en-US" sz="2700" dirty="0" spc="-3" kern="0">
-                <a:solidFill>
-                  <a:srgbClr val="14161C"/>
-                </a:solidFill>
-                <a:latin typeface="Be Vietnam Pro" pitchFamily="34" charset="0"/>
-                <a:ea typeface="Be Vietnam Pro" pitchFamily="34" charset="-122"/>
-                <a:cs typeface="Be Vietnam Pro" pitchFamily="34" charset="-120"/>
-              </a:rPr>
-              <a:t> theo</a:t>
-            </a:r>
-            <a:r>
-              <a:rPr lang="en-US" sz="2700" dirty="0" spc="-2" kern="0">
-                <a:solidFill>
-                  <a:srgbClr val="14161C"/>
-                </a:solidFill>
-                <a:latin typeface="Be Vietnam Pro" pitchFamily="34" charset="0"/>
-                <a:ea typeface="Be Vietnam Pro" pitchFamily="34" charset="-122"/>
-                <a:cs typeface="Be Vietnam Pro" pitchFamily="34" charset="-120"/>
-              </a:rPr>
-              <a:t> đúng</a:t>
-            </a:r>
-            <a:r>
-              <a:rPr lang="en-US" sz="2700" dirty="0" spc="0" kern="0">
-                <a:solidFill>
-                  <a:srgbClr val="14161C"/>
-                </a:solidFill>
-                <a:latin typeface="Be Vietnam Pro" pitchFamily="34" charset="0"/>
-                <a:ea typeface="Be Vietnam Pro" pitchFamily="34" charset="-122"/>
-                <a:cs typeface="Be Vietnam Pro" pitchFamily="34" charset="-120"/>
-              </a:rPr>
-              <a:t> cấp</a:t>
-            </a:r>
-            <a:r>
-              <a:rPr lang="en-US" sz="2700" dirty="0" spc="-2" kern="0">
-                <a:solidFill>
-                  <a:srgbClr val="14161C"/>
-                </a:solidFill>
-                <a:latin typeface="Be Vietnam Pro" pitchFamily="34" charset="0"/>
-                <a:ea typeface="Be Vietnam Pro" pitchFamily="34" charset="-122"/>
-                <a:cs typeface="Be Vietnam Pro" pitchFamily="34" charset="-120"/>
-              </a:rPr>
-              <a:t> khi</a:t>
-            </a:r>
-            <a:r>
-              <a:rPr lang="en-US" sz="2700" dirty="0" spc="-3" kern="0">
-                <a:solidFill>
-                  <a:srgbClr val="14161C"/>
-                </a:solidFill>
-                <a:latin typeface="Be Vietnam Pro" pitchFamily="34" charset="0"/>
-                <a:ea typeface="Be Vietnam Pro" pitchFamily="34" charset="-122"/>
-                <a:cs typeface="Be Vietnam Pro" pitchFamily="34" charset="-120"/>
-              </a:rPr>
-              <a:t> dữ</a:t>
-            </a:r>
-            <a:r>
-              <a:rPr lang="en-US" sz="2700" dirty="0" spc="-1" kern="0">
-                <a:solidFill>
-                  <a:srgbClr val="14161C"/>
-                </a:solidFill>
-                <a:latin typeface="Be Vietnam Pro" pitchFamily="34" charset="0"/>
-                <a:ea typeface="Be Vietnam Pro" pitchFamily="34" charset="-122"/>
-                <a:cs typeface="Be Vietnam Pro" pitchFamily="34" charset="-120"/>
-              </a:rPr>
-              <a:t> liệu</a:t>
-            </a:r>
-            <a:r>
-              <a:rPr lang="en-US" sz="2700" dirty="0" spc="-2" kern="0">
-                <a:solidFill>
-                  <a:srgbClr val="14161C"/>
-                </a:solidFill>
-                <a:latin typeface="Be Vietnam Pro" pitchFamily="34" charset="0"/>
-                <a:ea typeface="Be Vietnam Pro" pitchFamily="34" charset="-122"/>
-                <a:cs typeface="Be Vietnam Pro" pitchFamily="34" charset="-120"/>
-              </a:rPr>
-              <a:t> dài.</a:t>
+              <a:t> cấp.</a:t>
             </a:r>
             <a:endParaRPr lang="en-US" sz="2700" dirty="0"/>
           </a:p>
@@ -9202,7 +9048,62 @@
                 <a:ea typeface="Be Vietnam Pro" pitchFamily="34" charset="-122"/>
                 <a:cs typeface="Be Vietnam Pro" pitchFamily="34" charset="-120"/>
               </a:rPr>
-              <a:t>Thử</a:t>
+              <a:t>Thử bằng</a:t>
+            </a:r>
+            <a:r>
+              <a:rPr lang="en-US" sz="2400" dirty="0" spc="3" kern="0">
+                <a:solidFill>
+                  <a:srgbClr val="0F766E"/>
+                </a:solidFill>
+                <a:latin typeface="Be Vietnam Pro" pitchFamily="34" charset="0"/>
+                <a:ea typeface="Be Vietnam Pro" pitchFamily="34" charset="-122"/>
+                <a:cs typeface="Be Vietnam Pro" pitchFamily="34" charset="-120"/>
+              </a:rPr>
+              <a:t> dữ</a:t>
+            </a:r>
+            <a:r>
+              <a:rPr lang="en-US" sz="2400" dirty="0" spc="-2" kern="0">
+                <a:solidFill>
+                  <a:srgbClr val="0F766E"/>
+                </a:solidFill>
+                <a:latin typeface="Be Vietnam Pro" pitchFamily="34" charset="0"/>
+                <a:ea typeface="Be Vietnam Pro" pitchFamily="34" charset="-122"/>
+                <a:cs typeface="Be Vietnam Pro" pitchFamily="34" charset="-120"/>
+              </a:rPr>
+              <a:t> liệu</a:t>
+            </a:r>
+            <a:r>
+              <a:rPr lang="en-US" sz="2400" dirty="0" spc="2" kern="0">
+                <a:solidFill>
+                  <a:srgbClr val="0F766E"/>
+                </a:solidFill>
+                <a:latin typeface="Be Vietnam Pro" pitchFamily="34" charset="0"/>
+                <a:ea typeface="Be Vietnam Pro" pitchFamily="34" charset="-122"/>
+                <a:cs typeface="Be Vietnam Pro" pitchFamily="34" charset="-120"/>
+              </a:rPr>
+              <a:t> giả,</a:t>
+            </a:r>
+            <a:r>
+              <a:rPr lang="en-US" sz="2400" dirty="0" spc="13" kern="0">
+                <a:solidFill>
+                  <a:srgbClr val="0F766E"/>
+                </a:solidFill>
+                <a:latin typeface="Be Vietnam Pro" pitchFamily="34" charset="0"/>
+                <a:ea typeface="Be Vietnam Pro" pitchFamily="34" charset="-122"/>
+                <a:cs typeface="Be Vietnam Pro" pitchFamily="34" charset="-120"/>
+              </a:rPr>
+              <a:t> đối</a:t>
+            </a:r>
+            <a:r>
+              <a:rPr lang="en-US" sz="2400" dirty="0" spc="-2" kern="0">
+                <a:solidFill>
+                  <a:srgbClr val="0F766E"/>
+                </a:solidFill>
+                <a:latin typeface="Be Vietnam Pro" pitchFamily="34" charset="0"/>
+                <a:ea typeface="Be Vietnam Pro" pitchFamily="34" charset="-122"/>
+                <a:cs typeface="Be Vietnam Pro" pitchFamily="34" charset="-120"/>
+              </a:rPr>
+              <a:t> chiếu</a:t>
             </a:r>
             <a:r>
               <a:rPr lang="en-US" sz="2400" dirty="0" spc="-13" kern="0">
@@ -9216,7 +9117,7 @@
               <a:t> với</a:t>
             </a:r>
             <a:r>
-              <a:rPr lang="en-US" sz="2400" dirty="0" spc="3" kern="0">
+              <a:rPr lang="en-US" sz="2400" dirty="0" spc="6" kern="0">
                 <a:solidFill>
                   <a:srgbClr val="0F766E"/>
                 </a:solidFill>
@@ -9224,10 +9125,10 @@
                 <a:ea typeface="Be Vietnam Pro" pitchFamily="34" charset="-122"/>
                 <a:cs typeface="Be Vietnam Pro" pitchFamily="34" charset="-120"/>
               </a:rPr>
-              <a:t> dữ</a:t>
-            </a:r>
-            <a:r>
-              <a:rPr lang="en-US" sz="2400" dirty="0" spc="-1" kern="0">
+              <a:t> JSON</a:t>
+            </a:r>
+            <a:r>
+              <a:rPr lang="en-US" sz="2400" dirty="0" spc="-11" kern="0">
                 <a:solidFill>
                   <a:srgbClr val="0F766E"/>
                 </a:solidFill>
@@ -9235,95 +9136,7 @@
                 <a:ea typeface="Be Vietnam Pro" pitchFamily="34" charset="-122"/>
                 <a:cs typeface="Be Vietnam Pro" pitchFamily="34" charset="-120"/>
               </a:rPr>
-              <a:t> liệu</a:t>
-            </a:r>
-            <a:r>
-              <a:rPr lang="en-US" sz="2400" dirty="0" spc="1" kern="0">
-                <a:solidFill>
-                  <a:srgbClr val="0F766E"/>
-                </a:solidFill>
-                <a:latin typeface="Be Vietnam Pro" pitchFamily="34" charset="0"/>
-                <a:ea typeface="Be Vietnam Pro" pitchFamily="34" charset="-122"/>
-                <a:cs typeface="Be Vietnam Pro" pitchFamily="34" charset="-120"/>
-              </a:rPr>
-              <a:t> giả:</a:t>
-            </a:r>
-            <a:r>
-              <a:rPr lang="en-US" sz="2400" dirty="0" spc="2" kern="0">
-                <a:solidFill>
-                  <a:srgbClr val="0F766E"/>
-                </a:solidFill>
-                <a:latin typeface="Be Vietnam Pro" pitchFamily="34" charset="0"/>
-                <a:ea typeface="Be Vietnam Pro" pitchFamily="34" charset="-122"/>
-                <a:cs typeface="Be Vietnam Pro" pitchFamily="34" charset="-120"/>
-              </a:rPr>
-              <a:t> tìm</a:t>
-            </a:r>
-            <a:r>
-              <a:rPr lang="en-US" sz="2400" dirty="0" spc="-2" kern="0">
-                <a:solidFill>
-                  <a:srgbClr val="0F766E"/>
-                </a:solidFill>
-                <a:latin typeface="Be Vietnam Pro" pitchFamily="34" charset="0"/>
-                <a:ea typeface="Be Vietnam Pro" pitchFamily="34" charset="-122"/>
-                <a:cs typeface="Be Vietnam Pro" pitchFamily="34" charset="-120"/>
-              </a:rPr>
-              <a:t> một</a:t>
-            </a:r>
-            <a:r>
-              <a:rPr lang="en-US" sz="2400" dirty="0" spc="6" kern="0">
-                <a:solidFill>
-                  <a:srgbClr val="0F766E"/>
-                </a:solidFill>
-                <a:latin typeface="Be Vietnam Pro" pitchFamily="34" charset="0"/>
-                <a:ea typeface="Be Vietnam Pro" pitchFamily="34" charset="-122"/>
-                <a:cs typeface="Be Vietnam Pro" pitchFamily="34" charset="-120"/>
-              </a:rPr>
-              <a:t> trường,</a:t>
-            </a:r>
-            <a:r>
-              <a:rPr lang="en-US" sz="2400" dirty="0" spc="12" kern="0">
-                <a:solidFill>
-                  <a:srgbClr val="0F766E"/>
-                </a:solidFill>
-                <a:latin typeface="Be Vietnam Pro" pitchFamily="34" charset="0"/>
-                <a:ea typeface="Be Vietnam Pro" pitchFamily="34" charset="-122"/>
-                <a:cs typeface="Be Vietnam Pro" pitchFamily="34" charset="-120"/>
-              </a:rPr>
-              <a:t> đối</a:t>
-            </a:r>
-            <a:r>
-              <a:rPr lang="en-US" sz="2400" dirty="0" spc="-2" kern="0">
-                <a:solidFill>
-                  <a:srgbClr val="0F766E"/>
-                </a:solidFill>
-                <a:latin typeface="Be Vietnam Pro" pitchFamily="34" charset="0"/>
-                <a:ea typeface="Be Vietnam Pro" pitchFamily="34" charset="-122"/>
-                <a:cs typeface="Be Vietnam Pro" pitchFamily="34" charset="-120"/>
-              </a:rPr>
-              <a:t> chiếu</a:t>
-            </a:r>
-            <a:r>
-              <a:rPr lang="en-US" sz="2400" dirty="0" spc="7" kern="0">
-                <a:solidFill>
-                  <a:srgbClr val="0F766E"/>
-                </a:solidFill>
-                <a:latin typeface="Be Vietnam Pro" pitchFamily="34" charset="0"/>
-                <a:ea typeface="Be Vietnam Pro" pitchFamily="34" charset="-122"/>
-                <a:cs typeface="Be Vietnam Pro" pitchFamily="34" charset="-120"/>
-              </a:rPr>
-              <a:t> đường</a:t>
-            </a:r>
-            <a:r>
-              <a:rPr lang="en-US" sz="2400" dirty="0" spc="2" kern="0">
-                <a:solidFill>
-                  <a:srgbClr val="0F766E"/>
-                </a:solidFill>
-                <a:latin typeface="Be Vietnam Pro" pitchFamily="34" charset="0"/>
-                <a:ea typeface="Be Vietnam Pro" pitchFamily="34" charset="-122"/>
-                <a:cs typeface="Be Vietnam Pro" pitchFamily="34" charset="-120"/>
-              </a:rPr>
-              <a:t> dẫn.</a:t>
+              <a:t> gốc.</a:t>
             </a:r>
             <a:endParaRPr lang="en-US" sz="2400" dirty="0"/>
           </a:p>
@@ -10502,6 +10315,17 @@
               <a:buNone/>
             </a:pPr>
             <a:r>
+              <a:rPr lang="en-US" sz="2400" dirty="0" spc="0" kern="0">
+                <a:solidFill>
+                  <a:srgbClr val="E4E1D8"/>
+                </a:solidFill>
+                <a:latin typeface="Be Vietnam Pro" pitchFamily="34" charset="0"/>
+                <a:ea typeface="Be Vietnam Pro" pitchFamily="34" charset="-122"/>
+                <a:cs typeface="Be Vietnam Pro" pitchFamily="34" charset="-120"/>
+              </a:rPr>
+              <a:t>Khi</a:t>
+            </a:r>
+            <a:r>
               <a:rPr lang="en-US" sz="2400" dirty="0" spc="8" kern="0">
                 <a:solidFill>
                   <a:srgbClr val="E4E1D8"/>
@@ -10510,10 +10334,10 @@
                 <a:ea typeface="Be Vietnam Pro" pitchFamily="34" charset="-122"/>
                 <a:cs typeface="Be Vietnam Pro" pitchFamily="34" charset="-120"/>
               </a:rPr>
-              <a:t>Chưa</a:t>
-            </a:r>
-            <a:r>
-              <a:rPr lang="en-US" sz="2400" dirty="0" spc="-1" kern="0">
+              <a:t> thực</a:t>
+            </a:r>
+            <a:r>
+              <a:rPr lang="en-US" sz="2400" dirty="0" spc="1" kern="0">
                 <a:solidFill>
                   <a:srgbClr val="E4E1D8"/>
                 </a:solidFill>
@@ -10521,10 +10345,10 @@
                 <a:ea typeface="Be Vietnam Pro" pitchFamily="34" charset="-122"/>
                 <a:cs typeface="Be Vietnam Pro" pitchFamily="34" charset="-120"/>
               </a:rPr>
-              <a:t> kiểm</a:t>
-            </a:r>
-            <a:r>
-              <a:rPr lang="en-US" sz="2400" dirty="0" spc="18" kern="0">
+              <a:t> hành,</a:t>
+            </a:r>
+            <a:r>
+              <a:rPr lang="en-US" sz="2400" dirty="0" spc="0" kern="0">
                 <a:solidFill>
                   <a:srgbClr val="E4E1D8"/>
                 </a:solidFill>
@@ -10532,10 +10356,10 @@
                 <a:ea typeface="Be Vietnam Pro" pitchFamily="34" charset="-122"/>
                 <a:cs typeface="Be Vietnam Pro" pitchFamily="34" charset="-120"/>
               </a:rPr>
-              <a:t> chứng</a:t>
-            </a:r>
-            <a:r>
-              <a:rPr lang="en-US" sz="2400" dirty="0" spc="-1" kern="0">
+              <a:t> chỉ</a:t>
+            </a:r>
+            <a:r>
+              <a:rPr lang="en-US" sz="2400" dirty="0" spc="3" kern="0">
                 <a:solidFill>
                   <a:srgbClr val="E4E1D8"/>
                 </a:solidFill>
@@ -10543,10 +10367,10 @@
                 <a:ea typeface="Be Vietnam Pro" pitchFamily="34" charset="-122"/>
                 <a:cs typeface="Be Vietnam Pro" pitchFamily="34" charset="-120"/>
               </a:rPr>
-              <a:t> cách</a:t>
-            </a:r>
-            <a:r>
-              <a:rPr lang="en-US" sz="2400" dirty="0" spc="0" kern="0">
+              <a:t> dùng</a:t>
+            </a:r>
+            <a:r>
+              <a:rPr lang="en-US" sz="2400" dirty="0" spc="4" kern="0">
                 <a:solidFill>
                   <a:srgbClr val="E4E1D8"/>
                 </a:solidFill>
@@ -10554,10 +10378,10 @@
                 <a:ea typeface="Be Vietnam Pro" pitchFamily="34" charset="-122"/>
                 <a:cs typeface="Be Vietnam Pro" pitchFamily="34" charset="-120"/>
               </a:rPr>
-              <a:t> dịch</a:t>
-            </a:r>
-            <a:r>
-              <a:rPr lang="en-US" sz="2400" dirty="0" spc="1" kern="0">
+              <a:t> dữ</a:t>
+            </a:r>
+            <a:r>
+              <a:rPr lang="en-US" sz="2400" dirty="0" spc="-2" kern="0">
                 <a:solidFill>
                   <a:srgbClr val="E4E1D8"/>
                 </a:solidFill>
@@ -10565,87 +10389,10 @@
                 <a:ea typeface="Be Vietnam Pro" pitchFamily="34" charset="-122"/>
                 <a:cs typeface="Be Vietnam Pro" pitchFamily="34" charset="-120"/>
               </a:rPr>
-              <a:t> vụ</a:t>
-            </a:r>
-            <a:r>
-              <a:rPr lang="en-US" sz="2400" dirty="0" spc="14" kern="0">
-                <a:solidFill>
-                  <a:srgbClr val="E4E1D8"/>
-                </a:solidFill>
-                <a:latin typeface="Be Vietnam Pro" pitchFamily="34" charset="0"/>
-                <a:ea typeface="Be Vietnam Pro" pitchFamily="34" charset="-122"/>
-                <a:cs typeface="Be Vietnam Pro" pitchFamily="34" charset="-120"/>
-              </a:rPr>
-              <a:t> lưu,</a:t>
-            </a:r>
-            <a:r>
-              <a:rPr lang="en-US" sz="2400" dirty="0" spc="3" kern="0">
-                <a:solidFill>
-                  <a:srgbClr val="E4E1D8"/>
-                </a:solidFill>
-                <a:latin typeface="Be Vietnam Pro" pitchFamily="34" charset="0"/>
-                <a:ea typeface="Be Vietnam Pro" pitchFamily="34" charset="-122"/>
-                <a:cs typeface="Be Vietnam Pro" pitchFamily="34" charset="-120"/>
-              </a:rPr>
-              <a:t> xử</a:t>
-            </a:r>
-            <a:r>
-              <a:rPr lang="en-US" sz="2400" dirty="0" spc="0" kern="0">
-                <a:solidFill>
-                  <a:srgbClr val="E4E1D8"/>
-                </a:solidFill>
-                <a:latin typeface="Be Vietnam Pro" pitchFamily="34" charset="0"/>
-                <a:ea typeface="Be Vietnam Pro" pitchFamily="34" charset="-122"/>
-                <a:cs typeface="Be Vietnam Pro" pitchFamily="34" charset="-120"/>
-              </a:rPr>
-              <a:t> lý</a:t>
-            </a:r>
-            <a:r>
-              <a:rPr lang="en-US" sz="2400" dirty="0" spc="4" kern="0">
-                <a:solidFill>
-                  <a:srgbClr val="E4E1D8"/>
-                </a:solidFill>
-                <a:latin typeface="Be Vietnam Pro" pitchFamily="34" charset="0"/>
-                <a:ea typeface="Be Vietnam Pro" pitchFamily="34" charset="-122"/>
-                <a:cs typeface="Be Vietnam Pro" pitchFamily="34" charset="-120"/>
-              </a:rPr>
-              <a:t> dữ</a:t>
-            </a:r>
-            <a:r>
-              <a:rPr lang="en-US" sz="2400" dirty="0" spc="-1" kern="0">
-                <a:solidFill>
-                  <a:srgbClr val="E4E1D8"/>
-                </a:solidFill>
-                <a:latin typeface="Be Vietnam Pro" pitchFamily="34" charset="0"/>
-                <a:ea typeface="Be Vietnam Pro" pitchFamily="34" charset="-122"/>
-                <a:cs typeface="Be Vietnam Pro" pitchFamily="34" charset="-120"/>
-              </a:rPr>
-              <a:t> liệu: chỉ</a:t>
-            </a:r>
-            <a:r>
-              <a:rPr lang="en-US" sz="2400" dirty="0" spc="3" kern="0">
-                <a:solidFill>
-                  <a:srgbClr val="E4E1D8"/>
-                </a:solidFill>
-                <a:latin typeface="Be Vietnam Pro" pitchFamily="34" charset="0"/>
-                <a:ea typeface="Be Vietnam Pro" pitchFamily="34" charset="-122"/>
-                <a:cs typeface="Be Vietnam Pro" pitchFamily="34" charset="-120"/>
-              </a:rPr>
-              <a:t> dùng dữ</a:t>
-            </a:r>
-            <a:r>
-              <a:rPr lang="en-US" sz="2400" dirty="0" spc="-1" kern="0">
-                <a:solidFill>
-                  <a:srgbClr val="E4E1D8"/>
-                </a:solidFill>
-                <a:latin typeface="Be Vietnam Pro" pitchFamily="34" charset="0"/>
-                <a:ea typeface="Be Vietnam Pro" pitchFamily="34" charset="-122"/>
-                <a:cs typeface="Be Vietnam Pro" pitchFamily="34" charset="-120"/>
-              </a:rPr>
               <a:t> liệu</a:t>
             </a:r>
             <a:r>
-              <a:rPr lang="en-US" sz="2400" dirty="0" spc="1" kern="0">
+              <a:rPr lang="en-US" sz="2400" dirty="0" spc="2" kern="0">
                 <a:solidFill>
                   <a:srgbClr val="E4E1D8"/>
                 </a:solidFill>
@@ -12995,7 +12742,7 @@
               <a:t> chuỗi</a:t>
             </a:r>
             <a:r>
-              <a:rPr lang="en-US" sz="2700" dirty="0" spc="-4" kern="0">
+              <a:rPr lang="en-US" sz="2700" dirty="0" spc="-2" kern="0">
                 <a:solidFill>
                   <a:srgbClr val="F3EEE3"/>
                 </a:solidFill>
@@ -13003,10 +12750,10 @@
                 <a:ea typeface="Be Vietnam Pro" pitchFamily="34" charset="-122"/>
                 <a:cs typeface="Be Vietnam Pro" pitchFamily="34" charset="-120"/>
               </a:rPr>
-              <a:t> "2"</a:t>
-            </a:r>
-            <a:r>
-              <a:rPr lang="en-US" sz="2700" dirty="0" spc="-9" kern="0">
+              <a:t> "2", không</a:t>
+            </a:r>
+            <a:r>
+              <a:rPr lang="en-US" sz="2700" dirty="0" spc="-1" kern="0">
                 <a:solidFill>
                   <a:srgbClr val="F3EEE3"/>
                 </a:solidFill>
@@ -13014,10 +12761,10 @@
                 <a:ea typeface="Be Vietnam Pro" pitchFamily="34" charset="-122"/>
                 <a:cs typeface="Be Vietnam Pro" pitchFamily="34" charset="-120"/>
               </a:rPr>
-              <a:t> thay</a:t>
-            </a:r>
-            <a:r>
-              <a:rPr lang="en-US" sz="2700" dirty="0" spc="-1" kern="0">
+              <a:t> phải</a:t>
+            </a:r>
+            <a:r>
+              <a:rPr lang="en-US" sz="2700" dirty="0" spc="-13" kern="0">
                 <a:solidFill>
                   <a:srgbClr val="F3EEE3"/>
                 </a:solidFill>
@@ -13025,10 +12772,10 @@
                 <a:ea typeface="Be Vietnam Pro" pitchFamily="34" charset="-122"/>
                 <a:cs typeface="Be Vietnam Pro" pitchFamily="34" charset="-120"/>
               </a:rPr>
-              <a:t> vì</a:t>
-            </a:r>
-            <a:r>
-              <a:rPr lang="en-US" sz="2700" dirty="0" spc="-12" kern="0">
+              <a:t> số</a:t>
+            </a:r>
+            <a:r>
+              <a:rPr lang="en-US" sz="2700" dirty="0" spc="-3" kern="0">
                 <a:solidFill>
                   <a:srgbClr val="F3EEE3"/>
                 </a:solidFill>
@@ -13036,73 +12783,7 @@
                 <a:ea typeface="Be Vietnam Pro" pitchFamily="34" charset="-122"/>
                 <a:cs typeface="Be Vietnam Pro" pitchFamily="34" charset="-120"/>
               </a:rPr>
-              <a:t> số</a:t>
-            </a:r>
-            <a:r>
-              <a:rPr lang="en-US" sz="2700" dirty="0" spc="-4" kern="0">
-                <a:solidFill>
-                  <a:srgbClr val="F3EEE3"/>
-                </a:solidFill>
-                <a:latin typeface="Be Vietnam Pro" pitchFamily="34" charset="0"/>
-                <a:ea typeface="Be Vietnam Pro" pitchFamily="34" charset="-122"/>
-                <a:cs typeface="Be Vietnam Pro" pitchFamily="34" charset="-120"/>
-              </a:rPr>
-              <a:t> 2:</a:t>
-            </a:r>
-            <a:r>
-              <a:rPr lang="en-US" sz="2700" dirty="0" spc="-1" kern="0">
-                <a:solidFill>
-                  <a:srgbClr val="F3EEE3"/>
-                </a:solidFill>
-                <a:latin typeface="Be Vietnam Pro" pitchFamily="34" charset="0"/>
-                <a:ea typeface="Be Vietnam Pro" pitchFamily="34" charset="-122"/>
-                <a:cs typeface="Be Vietnam Pro" pitchFamily="34" charset="-120"/>
-              </a:rPr>
-              <a:t> cú</a:t>
-            </a:r>
-            <a:r>
-              <a:rPr lang="en-US" sz="2700" dirty="0" spc="-2" kern="0">
-                <a:solidFill>
-                  <a:srgbClr val="F3EEE3"/>
-                </a:solidFill>
-                <a:latin typeface="Be Vietnam Pro" pitchFamily="34" charset="0"/>
-                <a:ea typeface="Be Vietnam Pro" pitchFamily="34" charset="-122"/>
-                <a:cs typeface="Be Vietnam Pro" pitchFamily="34" charset="-120"/>
-              </a:rPr>
-              <a:t> pháp</a:t>
-            </a:r>
-            <a:r>
-              <a:rPr lang="en-US" sz="2700" dirty="0" spc="-13" kern="0">
-                <a:solidFill>
-                  <a:srgbClr val="F3EEE3"/>
-                </a:solidFill>
-                <a:latin typeface="Be Vietnam Pro" pitchFamily="34" charset="0"/>
-                <a:ea typeface="Be Vietnam Pro" pitchFamily="34" charset="-122"/>
-                <a:cs typeface="Be Vietnam Pro" pitchFamily="34" charset="-120"/>
-              </a:rPr>
-              <a:t> vẫn</a:t>
-            </a:r>
-            <a:r>
-              <a:rPr lang="en-US" sz="2700" dirty="0" spc="-3" kern="0">
-                <a:solidFill>
-                  <a:srgbClr val="F3EEE3"/>
-                </a:solidFill>
-                <a:latin typeface="Be Vietnam Pro" pitchFamily="34" charset="0"/>
-                <a:ea typeface="Be Vietnam Pro" pitchFamily="34" charset="-122"/>
-                <a:cs typeface="Be Vietnam Pro" pitchFamily="34" charset="-120"/>
-              </a:rPr>
-              <a:t> hợp</a:t>
-            </a:r>
-            <a:r>
-              <a:rPr lang="en-US" sz="2700" dirty="0" spc="-2" kern="0">
-                <a:solidFill>
-                  <a:srgbClr val="F3EEE3"/>
-                </a:solidFill>
-                <a:latin typeface="Be Vietnam Pro" pitchFamily="34" charset="0"/>
-                <a:ea typeface="Be Vietnam Pro" pitchFamily="34" charset="-122"/>
-                <a:cs typeface="Be Vietnam Pro" pitchFamily="34" charset="-120"/>
-              </a:rPr>
-              <a:t> lệ.</a:t>
+              <a:t> 2.</a:t>
             </a:r>
             <a:endParaRPr lang="en-US" sz="2700" dirty="0"/>
           </a:p>
